--- a/clang/learn.pptx
+++ b/clang/learn.pptx
@@ -6,7 +6,6 @@
   </p:sldMasterIdLst>
   <p:sldIdLst>
     <p:sldId id="256" r:id="rId2"/>
-    <p:sldId id="257" r:id="rId3"/>
   </p:sldIdLst>
   <p:sldSz cx="12192000" cy="6858000"/>
   <p:notesSz cx="6858000" cy="9144000"/>
@@ -4821,72 +4820,6 @@
 </p:sld>
 </file>
 
-<file path=ppt/slides/slide2.xml><?xml version="1.0" encoding="utf-8"?>
-<p:sld xmlns:a="http://schemas.openxmlformats.org/drawingml/2006/main" xmlns:r="http://schemas.openxmlformats.org/officeDocument/2006/relationships" xmlns:p="http://schemas.openxmlformats.org/presentationml/2006/main">
-  <p:cSld>
-    <p:spTree>
-      <p:nvGrpSpPr>
-        <p:cNvPr id="1" name=""/>
-        <p:cNvGrpSpPr/>
-        <p:nvPr/>
-      </p:nvGrpSpPr>
-      <p:grpSpPr>
-        <a:xfrm>
-          <a:off x="0" y="0"/>
-          <a:ext cx="0" cy="0"/>
-          <a:chOff x="0" y="0"/>
-          <a:chExt cx="0" cy="0"/>
-        </a:xfrm>
-      </p:grpSpPr>
-      <p:sp>
-        <p:nvSpPr>
-          <p:cNvPr id="4" name="文本框 3">
-            <a:extLst>
-              <a:ext uri="{FF2B5EF4-FFF2-40B4-BE49-F238E27FC236}">
-                <a16:creationId xmlns:a16="http://schemas.microsoft.com/office/drawing/2014/main" id="{4401B59E-58EC-B95B-F6C5-A2B9627EAF66}"/>
-              </a:ext>
-            </a:extLst>
-          </p:cNvPr>
-          <p:cNvSpPr txBox="1"/>
-          <p:nvPr/>
-        </p:nvSpPr>
-        <p:spPr>
-          <a:xfrm>
-            <a:off x="3460531" y="1868214"/>
-            <a:ext cx="1425390" cy="369332"/>
-          </a:xfrm>
-          <a:prstGeom prst="rect">
-            <a:avLst/>
-          </a:prstGeom>
-          <a:noFill/>
-        </p:spPr>
-        <p:txBody>
-          <a:bodyPr wrap="none" rtlCol="0">
-            <a:spAutoFit/>
-          </a:bodyPr>
-          <a:lstStyle/>
-          <a:p>
-            <a:r>
-              <a:rPr lang="en-US" altLang="zh-CN" dirty="0"/>
-              <a:t>1       1       1</a:t>
-            </a:r>
-            <a:endParaRPr lang="zh-CN" altLang="en-US" dirty="0"/>
-          </a:p>
-        </p:txBody>
-      </p:sp>
-    </p:spTree>
-    <p:extLst>
-      <p:ext uri="{BB962C8B-B14F-4D97-AF65-F5344CB8AC3E}">
-        <p14:creationId xmlns:p14="http://schemas.microsoft.com/office/powerpoint/2010/main" val="1655205656"/>
-      </p:ext>
-    </p:extLst>
-  </p:cSld>
-  <p:clrMapOvr>
-    <a:masterClrMapping/>
-  </p:clrMapOvr>
-</p:sld>
-</file>
-
 <file path=ppt/theme/theme1.xml><?xml version="1.0" encoding="utf-8"?>
 <a:theme xmlns:a="http://schemas.openxmlformats.org/drawingml/2006/main" name="Office 主题​​">
   <a:themeElements>
